--- a/public/SIH2026-IDEA-Presentation-SATYA-ID.pptx
+++ b/public/SIH2026-IDEA-Presentation-SATYA-ID.pptx
@@ -5957,7 +5957,7 @@
               <a:buChar char="•"/>
             </a:pPr>
             <a:r>
-              <a:rPr lang="en-US" sz="2000" b="1">
+              <a:rPr lang="en-US" sz="1800" b="1">
                 <a:solidFill>
                   <a:srgbClr val="0F172A"/>
                 </a:solidFill>
@@ -5967,42 +5967,42 @@
               <a:t>Problem Statement ID – </a:t>
             </a:r>
             <a:r>
-              <a:rPr lang="en-US" sz="2000" b="1">
+              <a:rPr lang="en-US" sz="1800" b="1">
                 <a:solidFill>
                   <a:srgbClr val="0070C0"/>
                 </a:solidFill>
                 <a:latin typeface="Arial"/>
                 <a:cs typeface="Arial"/>
               </a:rPr>
-              <a:t>SIH1608</a:t>
-            </a:r>
-            <a:r>
-              <a:rPr lang="en-US" sz="1800">
+              <a:t>SIH26188</a:t>
+            </a:r>
+            <a:r>
+              <a:rPr lang="en-US" sz="1600">
                 <a:solidFill>
                   <a:srgbClr val="475569"/>
                 </a:solidFill>
                 <a:latin typeface="Arial"/>
                 <a:cs typeface="Arial"/>
               </a:rPr>
-              <a:t> (Ministry of Home Affairs)</a:t>
+              <a:t> (Ministry of Home Affairs / I4C)</a:t>
             </a:r>
           </a:p>
           <a:p>
             <a:pPr marL="285750" indent="-285750" algn="l">
               <a:lnSpc>
-                <a:spcPct val="125000"/>
+                <a:spcPct val="118000"/>
               </a:lnSpc>
               <a:spcBef>
-                <a:spcPts val="160"/>
+                <a:spcPts val="110"/>
               </a:spcBef>
               <a:spcAft>
-                <a:spcPts val="90"/>
+                <a:spcPts val="60"/>
               </a:spcAft>
               <a:buFont typeface="Arial"/>
               <a:buChar char="•"/>
             </a:pPr>
             <a:r>
-              <a:rPr lang="en-US" sz="2000" b="1">
+              <a:rPr lang="en-US" sz="1800" b="1">
                 <a:solidFill>
                   <a:srgbClr val="0F172A"/>
                 </a:solidFill>
@@ -6012,7 +6012,7 @@
               <a:t>Problem Statement Title- </a:t>
             </a:r>
             <a:r>
-              <a:rPr lang="en-US" sz="1900">
+              <a:rPr lang="en-US" sz="1700">
                 <a:solidFill>
                   <a:srgbClr val="1E293B"/>
                 </a:solidFill>
@@ -6025,19 +6025,19 @@
           <a:p>
             <a:pPr marL="285750" indent="-285750" algn="l">
               <a:lnSpc>
-                <a:spcPct val="125000"/>
+                <a:spcPct val="118000"/>
               </a:lnSpc>
               <a:spcBef>
-                <a:spcPts val="160"/>
+                <a:spcPts val="110"/>
               </a:spcBef>
               <a:spcAft>
-                <a:spcPts val="90"/>
+                <a:spcPts val="60"/>
               </a:spcAft>
               <a:buFont typeface="Arial"/>
               <a:buChar char="•"/>
             </a:pPr>
             <a:r>
-              <a:rPr lang="en-US" sz="2000" b="1">
+              <a:rPr lang="en-US" sz="1800" b="1">
                 <a:solidFill>
                   <a:srgbClr val="0F172A"/>
                 </a:solidFill>
@@ -6047,32 +6047,32 @@
               <a:t>Theme- </a:t>
             </a:r>
             <a:r>
-              <a:rPr lang="en-US" sz="1900">
+              <a:rPr lang="en-US" sz="1700">
                 <a:solidFill>
                   <a:srgbClr val="1E293B"/>
                 </a:solidFill>
                 <a:latin typeface="Arial"/>
                 <a:cs typeface="Arial"/>
               </a:rPr>
-              <a:t>Security &amp; Surveillance / Cyber Security</a:t>
+              <a:t>Security &amp; Surveillance / Cyber Security / Smart Automation</a:t>
             </a:r>
           </a:p>
           <a:p>
             <a:pPr marL="285750" indent="-285750" algn="l">
               <a:lnSpc>
-                <a:spcPct val="125000"/>
+                <a:spcPct val="118000"/>
               </a:lnSpc>
               <a:spcBef>
-                <a:spcPts val="160"/>
+                <a:spcPts val="110"/>
               </a:spcBef>
               <a:spcAft>
-                <a:spcPts val="90"/>
+                <a:spcPts val="60"/>
               </a:spcAft>
               <a:buFont typeface="Arial"/>
               <a:buChar char="•"/>
             </a:pPr>
             <a:r>
-              <a:rPr lang="en-US" sz="2000" b="1">
+              <a:rPr lang="en-US" sz="1800" b="1">
                 <a:solidFill>
                   <a:srgbClr val="0F172A"/>
                 </a:solidFill>
@@ -6082,7 +6082,7 @@
               <a:t>PS Category- Software/Hardware: </a:t>
             </a:r>
             <a:r>
-              <a:rPr lang="en-US" sz="1900" b="1">
+              <a:rPr lang="en-US" sz="1700" b="1">
                 <a:solidFill>
                   <a:srgbClr val="0070C0"/>
                 </a:solidFill>
@@ -6095,19 +6095,19 @@
           <a:p>
             <a:pPr marL="285750" indent="-285750" algn="l">
               <a:lnSpc>
-                <a:spcPct val="125000"/>
+                <a:spcPct val="118000"/>
               </a:lnSpc>
               <a:spcBef>
-                <a:spcPts val="160"/>
+                <a:spcPts val="110"/>
               </a:spcBef>
               <a:spcAft>
-                <a:spcPts val="90"/>
+                <a:spcPts val="60"/>
               </a:spcAft>
               <a:buFont typeface="Arial"/>
               <a:buChar char="•"/>
             </a:pPr>
             <a:r>
-              <a:rPr lang="en-US" sz="2000" b="1">
+              <a:rPr lang="en-US" sz="1800" b="1">
                 <a:solidFill>
                   <a:srgbClr val="0F172A"/>
                 </a:solidFill>
@@ -6117,7 +6117,7 @@
               <a:t>Team ID- </a:t>
             </a:r>
             <a:r>
-              <a:rPr lang="en-US" sz="1900">
+              <a:rPr lang="en-US" sz="1700">
                 <a:solidFill>
                   <a:srgbClr val="475569"/>
                 </a:solidFill>
@@ -6130,19 +6130,19 @@
           <a:p>
             <a:pPr marL="285750" indent="-285750" algn="l">
               <a:lnSpc>
-                <a:spcPct val="125000"/>
+                <a:spcPct val="118000"/>
               </a:lnSpc>
               <a:spcBef>
-                <a:spcPts val="160"/>
+                <a:spcPts val="110"/>
               </a:spcBef>
               <a:spcAft>
-                <a:spcPts val="90"/>
+                <a:spcPts val="60"/>
               </a:spcAft>
               <a:buFont typeface="Arial"/>
               <a:buChar char="•"/>
             </a:pPr>
             <a:r>
-              <a:rPr lang="en-US" sz="2000" b="1">
+              <a:rPr lang="en-US" sz="1800" b="1">
                 <a:solidFill>
                   <a:srgbClr val="0F172A"/>
                 </a:solidFill>
@@ -6152,7 +6152,7 @@
               <a:t>Team Name (Registered on portal): </a:t>
             </a:r>
             <a:r>
-              <a:rPr lang="en-US" sz="2000" b="1">
+              <a:rPr lang="en-US" sz="1800" b="1">
                 <a:solidFill>
                   <a:srgbClr val="0070C0"/>
                 </a:solidFill>
@@ -6162,7 +6162,7 @@
               <a:t>SATYA-ID</a:t>
             </a:r>
             <a:r>
-              <a:rPr lang="en-US" sz="1800">
+              <a:rPr lang="en-US" sz="1600">
                 <a:solidFill>
                   <a:srgbClr val="475569"/>
                 </a:solidFill>
@@ -6170,6 +6170,86 @@
                 <a:cs typeface="Arial"/>
               </a:rPr>
               <a:t> (National Document Screening Team)</a:t>
+            </a:r>
+          </a:p>
+          <a:p>
+            <a:pPr marL="285750" indent="-285750" algn="l">
+              <a:lnSpc>
+                <a:spcPct val="118000"/>
+              </a:lnSpc>
+              <a:spcBef>
+                <a:spcPts val="110"/>
+              </a:spcBef>
+              <a:spcAft>
+                <a:spcPts val="60"/>
+              </a:spcAft>
+              <a:buFont typeface="Arial"/>
+              <a:buChar char="•"/>
+            </a:pPr>
+            <a:r>
+              <a:rPr lang="en-US" sz="1800" b="1">
+                <a:solidFill>
+                  <a:srgbClr val="0F172A"/>
+                </a:solidFill>
+                <a:latin typeface="Arial"/>
+                <a:cs typeface="Arial"/>
+              </a:rPr>
+              <a:t>Live Production URL: </a:t>
+            </a:r>
+            <a:r>
+              <a:rPr lang="en-US" sz="1700" b="1" u="sng">
+                <a:solidFill>
+                  <a:srgbClr val="059669"/>
+                </a:solidFill>
+                <a:latin typeface="Arial"/>
+                <a:cs typeface="Arial"/>
+              </a:rPr>
+              <a:t>https://satya-id-screening.vercel.app</a:t>
+            </a:r>
+            <a:r>
+              <a:rPr lang="en-US" sz="1500">
+                <a:solidFill>
+                  <a:srgbClr val="10B981"/>
+                </a:solidFill>
+                <a:latin typeface="Arial"/>
+                <a:cs typeface="Arial"/>
+              </a:rPr>
+              <a:t> [200 OK Live]</a:t>
+            </a:r>
+          </a:p>
+          <a:p>
+            <a:pPr marL="285750" indent="-285750" algn="l">
+              <a:lnSpc>
+                <a:spcPct val="118000"/>
+              </a:lnSpc>
+              <a:spcBef>
+                <a:spcPts val="110"/>
+              </a:spcBef>
+              <a:spcAft>
+                <a:spcPts val="60"/>
+              </a:spcAft>
+              <a:buFont typeface="Arial"/>
+              <a:buChar char="•"/>
+            </a:pPr>
+            <a:r>
+              <a:rPr lang="en-US" sz="1800" b="1">
+                <a:solidFill>
+                  <a:srgbClr val="0F172A"/>
+                </a:solidFill>
+                <a:latin typeface="Arial"/>
+                <a:cs typeface="Arial"/>
+              </a:rPr>
+              <a:t>GitHub Repository: </a:t>
+            </a:r>
+            <a:r>
+              <a:rPr lang="en-US" sz="1700" b="1" u="sng">
+                <a:solidFill>
+                  <a:srgbClr val="0070C0"/>
+                </a:solidFill>
+                <a:latin typeface="Arial"/>
+                <a:cs typeface="Arial"/>
+              </a:rPr>
+              <a:t>https://github.com/Sachin7-kumar/satya-id-screening</a:t>
             </a:r>
           </a:p>
         </p:txBody>
@@ -6428,7 +6508,7 @@
                 <a:latin typeface="Arial" pitchFamily="34" charset="0"/>
                 <a:cs typeface="Arial" pitchFamily="34" charset="0"/>
               </a:rPr>
-              <a:t>Multi-Spectral 5-Tier Forensic Engine </a:t>
+              <a:t>Multi-Spectral 5-Tier Forensic Engine: </a:t>
             </a:r>
             <a:r>
               <a:rPr lang="en-US" sz="1300" dirty="0">
@@ -6438,7 +6518,7 @@
                 <a:latin typeface="Arial" pitchFamily="34" charset="0"/>
                 <a:cs typeface="Arial" pitchFamily="34" charset="0"/>
               </a:rPr>
-              <a:t>(&lt;40ms Scan Time)</a:t>
+              <a:t>Math Checksums, ELA, Metrology, Face Morph, Gemini AI (&lt;40ms)</a:t>
             </a:r>
           </a:p>
           <a:p>
@@ -6463,7 +6543,7 @@
                 <a:latin typeface="Arial" pitchFamily="34" charset="0"/>
                 <a:cs typeface="Arial" pitchFamily="34" charset="0"/>
               </a:rPr>
-              <a:t>Zero-Storage In-RAM Execution </a:t>
+              <a:t>Zero-Storage In-RAM Execution: </a:t>
             </a:r>
             <a:r>
               <a:rPr lang="en-US" sz="1300" dirty="0">
@@ -6473,7 +6553,7 @@
                 <a:latin typeface="Arial" pitchFamily="34" charset="0"/>
                 <a:cs typeface="Arial" pitchFamily="34" charset="0"/>
               </a:rPr>
-              <a:t>(DPDP Act 2023 Compliant)</a:t>
+              <a:t>Section 8 DPDP Act 2023 compliant; 0 disk persistence</a:t>
             </a:r>
           </a:p>
           <a:p>
@@ -6498,7 +6578,7 @@
                 <a:latin typeface="Arial" pitchFamily="34" charset="0"/>
                 <a:cs typeface="Arial" pitchFamily="34" charset="0"/>
               </a:rPr>
-              <a:t>Operational Working Prototype </a:t>
+              <a:t>Operational Web Application: </a:t>
             </a:r>
             <a:r>
               <a:rPr lang="en-US" sz="1300" dirty="0">
@@ -6508,7 +6588,7 @@
                 <a:latin typeface="Arial" pitchFamily="34" charset="0"/>
                 <a:cs typeface="Arial" pitchFamily="34" charset="0"/>
               </a:rPr>
-              <a:t>with Live Forensics HUD</a:t>
+              <a:t>Live on Vercel (https://satya-id-screening.vercel.app)</a:t>
             </a:r>
           </a:p>
           <a:p>
@@ -6558,7 +6638,7 @@
                 <a:latin typeface="Arial" pitchFamily="34" charset="0"/>
                 <a:cs typeface="Arial" pitchFamily="34" charset="0"/>
               </a:rPr>
-              <a:t>Detects Pixel Tampering &amp; Font Drift </a:t>
+              <a:t>Pixel-Level Tamper Forensics: </a:t>
             </a:r>
             <a:r>
               <a:rPr lang="en-US" sz="1300" dirty="0">
@@ -6568,7 +6648,7 @@
                 <a:latin typeface="Arial" pitchFamily="34" charset="0"/>
                 <a:cs typeface="Arial" pitchFamily="34" charset="0"/>
               </a:rPr>
-              <a:t>(Bypasses Blind OCR)</a:t>
+              <a:t>Exposes splices &amp; font drift that bypass blind OCR models</a:t>
             </a:r>
           </a:p>
           <a:p>
@@ -6593,7 +6673,7 @@
                 <a:latin typeface="Arial" pitchFamily="34" charset="0"/>
                 <a:cs typeface="Arial" pitchFamily="34" charset="0"/>
               </a:rPr>
-              <a:t>Halts Ground Cybercrime </a:t>
+              <a:t>Halts Ground Cybercrime: </a:t>
             </a:r>
             <a:r>
               <a:rPr lang="en-US" sz="1300" dirty="0">
@@ -6603,7 +6683,7 @@
                 <a:latin typeface="Arial" pitchFamily="34" charset="0"/>
                 <a:cs typeface="Arial" pitchFamily="34" charset="0"/>
               </a:rPr>
-              <a:t>(71.2% Document Forgery in NCRB)</a:t>
+              <a:t>Targets 71.2% document forgery in 65,893+ NCRB cases</a:t>
             </a:r>
           </a:p>
           <a:p>
@@ -6653,7 +6733,7 @@
                 <a:latin typeface="Arial" pitchFamily="34" charset="0"/>
                 <a:cs typeface="Arial" pitchFamily="34" charset="0"/>
               </a:rPr>
-              <a:t>Automated Section 63 BSA 2023 </a:t>
+              <a:t>Automated Section 63 BSA 2023: </a:t>
             </a:r>
             <a:r>
               <a:rPr lang="en-US" sz="1300" dirty="0">
@@ -6663,7 +6743,7 @@
                 <a:latin typeface="Arial" pitchFamily="34" charset="0"/>
                 <a:cs typeface="Arial" pitchFamily="34" charset="0"/>
               </a:rPr>
-              <a:t>Cryptographic Evidence Seals</a:t>
+              <a:t>Court-admissible electronic certificate with SHA-256 seal</a:t>
             </a:r>
           </a:p>
           <a:p>
@@ -6698,7 +6778,7 @@
                 <a:latin typeface="Arial" pitchFamily="34" charset="0"/>
                 <a:cs typeface="Arial" pitchFamily="34" charset="0"/>
               </a:rPr>
-              <a:t>18–34ms Latency | 1,620 Docs/Min | &lt;0.18% FPR</a:t>
+              <a:t>18–34ms Latency | 1,620 Docs/Min | &lt;0.18% FPR on commodity PCs</a:t>
             </a:r>
           </a:p>
         </p:txBody>
@@ -7092,7 +7172,7 @@
                 <a:latin typeface="Arial" pitchFamily="34" charset="0"/>
                 <a:cs typeface="Arial" pitchFamily="34" charset="0"/>
               </a:rPr>
-              <a:t>Core Forensic Engines: </a:t>
+              <a:t>Forensic Core Engines: </a:t>
             </a:r>
             <a:r>
               <a:rPr lang="en-US" sz="1300" dirty="0">
@@ -7102,7 +7182,7 @@
                 <a:latin typeface="Arial" pitchFamily="34" charset="0"/>
                 <a:cs typeface="Arial" pitchFamily="34" charset="0"/>
               </a:rPr>
-              <a:t>C++, WebAssembly &amp; Python (OpenCV, DCT Fourier)</a:t>
+              <a:t>C++, WebAssembly &amp; Python (OpenCV, DCT Fourier, Verhoeff D5)</a:t>
             </a:r>
           </a:p>
           <a:p>
@@ -7137,7 +7217,7 @@
                 <a:latin typeface="Arial" pitchFamily="34" charset="0"/>
                 <a:cs typeface="Arial" pitchFamily="34" charset="0"/>
               </a:rPr>
-              <a:t>React 19 + Vite HUD, Node.js, Express 5, Canvas API</a:t>
+              <a:t>React 19 + Vite HUD, Express 5 Serverless on Vercel, Node.js</a:t>
             </a:r>
           </a:p>
           <a:p>
@@ -7162,7 +7242,42 @@
                 <a:latin typeface="Arial" pitchFamily="34" charset="0"/>
                 <a:cs typeface="Arial" pitchFamily="34" charset="0"/>
               </a:rPr>
-              <a:t>AI &amp; Hardware: </a:t>
+              <a:t>Open-Source Repository: </a:t>
+            </a:r>
+            <a:r>
+              <a:rPr lang="en-US" sz="1300" dirty="0">
+                <a:solidFill>
+                  <a:srgbClr val="1E293B"/>
+                </a:solidFill>
+                <a:latin typeface="Arial" pitchFamily="34" charset="0"/>
+                <a:cs typeface="Arial" pitchFamily="34" charset="0"/>
+              </a:rPr>
+              <a:t>https://github.com/Sachin7-kumar/satya-id-screening</a:t>
+            </a:r>
+          </a:p>
+          <a:p>
+            <a:pPr marL="550000" indent="-200000" algn="l">
+              <a:lnSpc>
+                <a:spcPct val="118000"/>
+              </a:lnSpc>
+              <a:spcBef>
+                <a:spcPts val="55"/>
+              </a:spcBef>
+              <a:spcAft>
+                <a:spcPts val="35"/>
+              </a:spcAft>
+              <a:buFont typeface="Arial" pitchFamily="34" charset="0"/>
+              <a:buChar char="–"/>
+            </a:pPr>
+            <a:r>
+              <a:rPr lang="en-US" sz="1300" b="1" dirty="0">
+                <a:solidFill>
+                  <a:srgbClr val="0070C0"/>
+                </a:solidFill>
+                <a:latin typeface="Arial" pitchFamily="34" charset="0"/>
+                <a:cs typeface="Arial" pitchFamily="34" charset="0"/>
+              </a:rPr>
+              <a:t>AI &amp; Hardware Specs: </a:t>
             </a:r>
             <a:r>
               <a:rPr lang="en-US" sz="1300" dirty="0">
@@ -7232,7 +7347,7 @@
                 <a:latin typeface="Arial" pitchFamily="34" charset="0"/>
                 <a:cs typeface="Arial" pitchFamily="34" charset="0"/>
               </a:rPr>
-              <a:t>RAM Ingestion ➔ Math Checksums ➔ ELA ➔ Metrology/AI ➔ Sec 63 BSA</a:t>
+              <a:t>RAM Ingest ➔ Checksums (&lt;5ms) ➔ ELA Physics ➔ Metrology/Morph ➔ Sec 63 BSA</a:t>
             </a:r>
           </a:p>
           <a:p>
@@ -7267,7 +7382,7 @@
                 <a:latin typeface="Arial" pitchFamily="34" charset="0"/>
                 <a:cs typeface="Arial" pitchFamily="34" charset="0"/>
               </a:rPr>
-              <a:t>100% Offline Autonomy | 18–34ms Latency | 1,620 Docs/Min</a:t>
+              <a:t>18–34ms Latency | 1,620 Docs/Min | 100% Offline Edge Autonomy</a:t>
             </a:r>
           </a:p>
         </p:txBody>
@@ -7771,7 +7886,7 @@
                 <a:latin typeface="Arial" pitchFamily="34" charset="0"/>
                 <a:cs typeface="Arial" pitchFamily="34" charset="0"/>
               </a:rPr>
-              <a:t>GenAI Inpainting: </a:t>
+              <a:t>GenAI Inpainting Risk: </a:t>
             </a:r>
             <a:r>
               <a:rPr lang="en-US" sz="1250" dirty="0">
@@ -7781,7 +7896,7 @@
                 <a:latin typeface="Arial" pitchFamily="34" charset="0"/>
                 <a:cs typeface="Arial" pitchFamily="34" charset="0"/>
               </a:rPr>
-              <a:t>Diffusion Synthesis Without Pixel Boundaries</a:t>
+              <a:t>Diffusion synthesis generates realistic text without pixel seams</a:t>
             </a:r>
           </a:p>
           <a:p>
@@ -9204,10 +9319,10 @@
                 <a:spcPct val="118000"/>
               </a:lnSpc>
               <a:spcBef>
-                <a:spcPts val="40"/>
+                <a:spcPts val="38"/>
               </a:spcBef>
               <a:spcAft>
-                <a:spcPts val="20"/>
+                <a:spcPts val="18"/>
               </a:spcAft>
               <a:buFont typeface="Arial" pitchFamily="34" charset="0"/>
               <a:buChar char="–"/>
@@ -9230,7 +9345,7 @@
                 <a:latin typeface="Arial" pitchFamily="34" charset="0"/>
                 <a:cs typeface="Arial" pitchFamily="34" charset="0"/>
               </a:rPr>
-              <a:t>65,893 Cases (71.2% Document Forgery Rate)</a:t>
+              <a:t>65,893 Cases (71.2% Document Forgery Rate) – ncrb.gov.in</a:t>
             </a:r>
           </a:p>
           <a:p>
@@ -9239,10 +9354,10 @@
                 <a:spcPct val="118000"/>
               </a:lnSpc>
               <a:spcBef>
-                <a:spcPts val="40"/>
+                <a:spcPts val="38"/>
               </a:spcBef>
               <a:spcAft>
-                <a:spcPts val="20"/>
+                <a:spcPts val="18"/>
               </a:spcAft>
               <a:buFont typeface="Arial" pitchFamily="34" charset="0"/>
               <a:buChar char="–"/>
@@ -9265,7 +9380,7 @@
                 <a:latin typeface="Arial" pitchFamily="34" charset="0"/>
                 <a:cs typeface="Arial" pitchFamily="34" charset="0"/>
               </a:rPr>
-              <a:t>67.2 Lakh Fraudulent Ghost SIM Cards Blocked</a:t>
+              <a:t>67.2 Lakh Fraudulent Ghost SIM Cards Blocked – sancharsaathi.gov.in</a:t>
             </a:r>
           </a:p>
           <a:p>
@@ -9274,10 +9389,10 @@
                 <a:spcPct val="118000"/>
               </a:lnSpc>
               <a:spcBef>
-                <a:spcPts val="40"/>
+                <a:spcPts val="38"/>
               </a:spcBef>
               <a:spcAft>
-                <a:spcPts val="20"/>
+                <a:spcPts val="18"/>
               </a:spcAft>
               <a:buFont typeface="Arial" pitchFamily="34" charset="0"/>
               <a:buChar char="–"/>
@@ -9300,7 +9415,7 @@
                 <a:latin typeface="Arial" pitchFamily="34" charset="0"/>
                 <a:cs typeface="Arial" pitchFamily="34" charset="0"/>
               </a:rPr>
-              <a:t>Digital Image Error Level Analysis (ELA) Standards</a:t>
+              <a:t>Digital Image Error Level Analysis (ELA) Forensic Standards</a:t>
             </a:r>
           </a:p>
           <a:p>
@@ -9309,10 +9424,10 @@
                 <a:spcPct val="118000"/>
               </a:lnSpc>
               <a:spcBef>
-                <a:spcPts val="40"/>
+                <a:spcPts val="38"/>
               </a:spcBef>
               <a:spcAft>
-                <a:spcPts val="20"/>
+                <a:spcPts val="18"/>
               </a:spcAft>
               <a:buFont typeface="Arial" pitchFamily="34" charset="0"/>
               <a:buChar char="–"/>
@@ -9335,7 +9450,7 @@
                 <a:latin typeface="Arial" pitchFamily="34" charset="0"/>
                 <a:cs typeface="Arial" pitchFamily="34" charset="0"/>
               </a:rPr>
-              <a:t>Verhoeff Dihedral Group D5 Checksum</a:t>
+              <a:t>Verhoeff Dihedral Group D5 Checksum Algorithm</a:t>
             </a:r>
           </a:p>
           <a:p>
@@ -9344,10 +9459,10 @@
                 <a:spcPct val="118000"/>
               </a:lnSpc>
               <a:spcBef>
-                <a:spcPts val="40"/>
+                <a:spcPts val="38"/>
               </a:spcBef>
               <a:spcAft>
-                <a:spcPts val="20"/>
+                <a:spcPts val="18"/>
               </a:spcAft>
               <a:buFont typeface="Arial" pitchFamily="34" charset="0"/>
               <a:buChar char="–"/>
@@ -9370,7 +9485,7 @@
                 <a:latin typeface="Arial" pitchFamily="34" charset="0"/>
                 <a:cs typeface="Arial" pitchFamily="34" charset="0"/>
               </a:rPr>
-              <a:t>Section 63 Evidence Admissibility</a:t>
+              <a:t>Section 63 Evidence Admissibility (replacing Sec 65B)</a:t>
             </a:r>
           </a:p>
           <a:p>
@@ -9379,10 +9494,10 @@
                 <a:spcPct val="118000"/>
               </a:lnSpc>
               <a:spcBef>
-                <a:spcPts val="40"/>
+                <a:spcPts val="38"/>
               </a:spcBef>
               <a:spcAft>
-                <a:spcPts val="20"/>
+                <a:spcPts val="18"/>
               </a:spcAft>
               <a:buFont typeface="Arial" pitchFamily="34" charset="0"/>
               <a:buChar char="–"/>
@@ -9405,7 +9520,7 @@
                 <a:latin typeface="Arial" pitchFamily="34" charset="0"/>
                 <a:cs typeface="Arial" pitchFamily="34" charset="0"/>
               </a:rPr>
-              <a:t>Face Morphing Attack Detection Standards</a:t>
+              <a:t>Face Morphing Attack Detection Standards in Border E-Gates</a:t>
             </a:r>
           </a:p>
           <a:p>
@@ -9414,10 +9529,10 @@
                 <a:spcPct val="118000"/>
               </a:lnSpc>
               <a:spcBef>
-                <a:spcPts val="40"/>
+                <a:spcPts val="38"/>
               </a:spcBef>
               <a:spcAft>
-                <a:spcPts val="20"/>
+                <a:spcPts val="18"/>
               </a:spcAft>
               <a:buFont typeface="Arial" pitchFamily="34" charset="0"/>
               <a:buChar char="–"/>
@@ -9430,7 +9545,7 @@
                 <a:latin typeface="Arial" pitchFamily="34" charset="0"/>
                 <a:cs typeface="Arial" pitchFamily="34" charset="0"/>
               </a:rPr>
-              <a:t>[7] TransUnion CIBIL &amp; RBI Study: </a:t>
+              <a:t>[7] DPDP Act 2023 (Section 8): </a:t>
             </a:r>
             <a:r>
               <a:rPr lang="en-US" sz="1200" dirty="0">
@@ -9440,7 +9555,7 @@
                 <a:latin typeface="Arial" pitchFamily="34" charset="0"/>
                 <a:cs typeface="Arial" pitchFamily="34" charset="0"/>
               </a:rPr>
-              <a:t>Synthetic ID Fraud in Retail Lending</a:t>
+              <a:t>Statutory Mandate: Zero Citizen ID Retention in Memory</a:t>
             </a:r>
           </a:p>
           <a:p>
@@ -9449,10 +9564,10 @@
                 <a:spcPct val="118000"/>
               </a:lnSpc>
               <a:spcBef>
-                <a:spcPts val="40"/>
+                <a:spcPts val="38"/>
               </a:spcBef>
               <a:spcAft>
-                <a:spcPts val="20"/>
+                <a:spcPts val="18"/>
               </a:spcAft>
               <a:buFont typeface="Arial" pitchFamily="34" charset="0"/>
               <a:buChar char="–"/>
@@ -9465,7 +9580,7 @@
                 <a:latin typeface="Arial" pitchFamily="34" charset="0"/>
                 <a:cs typeface="Arial" pitchFamily="34" charset="0"/>
               </a:rPr>
-              <a:t>[8] DPDP Act 2023 (Section 8): </a:t>
+              <a:t>[8] Live Vercel Production: </a:t>
             </a:r>
             <a:r>
               <a:rPr lang="en-US" sz="1200" dirty="0">
@@ -9475,7 +9590,42 @@
                 <a:latin typeface="Arial" pitchFamily="34" charset="0"/>
                 <a:cs typeface="Arial" pitchFamily="34" charset="0"/>
               </a:rPr>
-              <a:t>Zero Citizen ID Retention Memory Mandate</a:t>
+              <a:t>https://satya-id-screening.vercel.app</a:t>
+            </a:r>
+          </a:p>
+          <a:p>
+            <a:pPr marL="550000" indent="-200000" algn="l">
+              <a:lnSpc>
+                <a:spcPct val="118000"/>
+              </a:lnSpc>
+              <a:spcBef>
+                <a:spcPts val="38"/>
+              </a:spcBef>
+              <a:spcAft>
+                <a:spcPts val="18"/>
+              </a:spcAft>
+              <a:buFont typeface="Arial" pitchFamily="34" charset="0"/>
+              <a:buChar char="–"/>
+            </a:pPr>
+            <a:r>
+              <a:rPr lang="en-US" sz="1200" b="1" dirty="0">
+                <a:solidFill>
+                  <a:srgbClr val="0070C0"/>
+                </a:solidFill>
+                <a:latin typeface="Arial" pitchFamily="34" charset="0"/>
+                <a:cs typeface="Arial" pitchFamily="34" charset="0"/>
+              </a:rPr>
+              <a:t>[9] GitHub Open Source Repo: </a:t>
+            </a:r>
+            <a:r>
+              <a:rPr lang="en-US" sz="1200" dirty="0">
+                <a:solidFill>
+                  <a:srgbClr val="1E293B"/>
+                </a:solidFill>
+                <a:latin typeface="Arial" pitchFamily="34" charset="0"/>
+                <a:cs typeface="Arial" pitchFamily="34" charset="0"/>
+              </a:rPr>
+              <a:t>https://github.com/Sachin7-kumar/satya-id-screening</a:t>
             </a:r>
           </a:p>
         </p:txBody>
